--- a/slides/project.pptx
+++ b/slides/project.pptx
@@ -7657,7 +7657,7 @@
           <p:nvPr/>
         </p:nvGraphicFramePr>
         <p:xfrm>
-          <a:off x="566928" y="1882384"/>
+          <a:off x="566928" y="1860804"/>
           <a:ext cx="11057836" cy="1995220"/>
         </p:xfrm>
         <a:graphic>
@@ -8161,8 +8161,8 @@
         </p:nvSpPr>
         <p:spPr>
           <a:xfrm>
-            <a:off x="566928" y="4151924"/>
-            <a:ext cx="11057839" cy="2012411"/>
+            <a:off x="566928" y="4130344"/>
+            <a:ext cx="11057839" cy="2055571"/>
           </a:xfrm>
           <a:prstGeom prst="rect">
             <a:avLst/>
@@ -8186,7 +8186,7 @@
               <a:buChar char="■"/>
             </a:pPr>
             <a:r>
-              <a:rPr sz="1728" b="0">
+              <a:rPr sz="1439" b="0">
                 <a:solidFill>
                   <a:srgbClr val="1B2738"/>
                 </a:solidFill>
@@ -8195,7 +8195,7 @@
               <a:t>Накладные расходы очереди — </a:t>
             </a:r>
             <a:r>
-              <a:rPr sz="1728" b="1">
+              <a:rPr sz="1439" b="1">
                 <a:solidFill>
                   <a:srgbClr val="1B2738"/>
                 </a:solidFill>
@@ -8204,7 +8204,7 @@
               <a:t>≈3 мс</a:t>
             </a:r>
             <a:r>
-              <a:rPr sz="1728" b="0">
+              <a:rPr sz="1439" b="0">
                 <a:solidFill>
                   <a:srgbClr val="1B2738"/>
                 </a:solidFill>
@@ -8225,7 +8225,7 @@
               <a:buChar char="■"/>
             </a:pPr>
             <a:r>
-              <a:rPr sz="1728" b="1">
+              <a:rPr sz="1439" b="1">
                 <a:solidFill>
                   <a:srgbClr val="1B2738"/>
                 </a:solidFill>
@@ -8234,7 +8234,7 @@
               <a:t>От ≈50 мс полезной работы фреймворк и брокер не влияют</a:t>
             </a:r>
             <a:r>
-              <a:rPr sz="1728" b="0">
+              <a:rPr sz="1439" b="0">
                 <a:solidFill>
                   <a:srgbClr val="1B2738"/>
                 </a:solidFill>
@@ -8255,7 +8255,7 @@
               <a:buChar char="■"/>
             </a:pPr>
             <a:r>
-              <a:rPr sz="1728" b="0">
+              <a:rPr sz="1439" b="0">
                 <a:solidFill>
                   <a:srgbClr val="1B2738"/>
                 </a:solidFill>
@@ -8264,7 +8264,7 @@
               <a:t>Масштабирование воркерами — </a:t>
             </a:r>
             <a:r>
-              <a:rPr sz="1728" b="1">
+              <a:rPr sz="1439" b="1">
                 <a:solidFill>
                   <a:srgbClr val="1B2738"/>
                 </a:solidFill>
@@ -8273,7 +8273,7 @@
               <a:t>×3,4–4,1</a:t>
             </a:r>
             <a:r>
-              <a:rPr sz="1728" b="0">
+              <a:rPr sz="1439" b="0">
                 <a:solidFill>
                   <a:srgbClr val="1B2738"/>
                 </a:solidFill>
@@ -8282,7 +8282,7 @@
               <a:t> при четырёх воркерах; </a:t>
             </a:r>
             <a:r>
-              <a:rPr sz="1628" b="0">
+              <a:rPr sz="1339" b="0">
                 <a:solidFill>
                   <a:srgbClr val="E8590C"/>
                 </a:solidFill>
@@ -8291,13 +8291,79 @@
               <a:t>fork</a:t>
             </a:r>
             <a:r>
-              <a:rPr sz="1728" b="0">
+              <a:rPr sz="1439" b="0">
                 <a:solidFill>
                   <a:srgbClr val="1B2738"/>
                 </a:solidFill>
                 <a:latin typeface="Segoe UI"/>
               </a:rPr>
               <a:t> в RQ стоит порядок величины на микрозадачах.</a:t>
+            </a:r>
+          </a:p>
+          <a:p>
+            <a:pPr marL="237744" indent="-219456">
+              <a:spcAft>
+                <a:spcPts val="672"/>
+              </a:spcAft>
+              <a:buClr>
+                <a:srgbClr val="2F6FED"/>
+              </a:buClr>
+              <a:buFont typeface="Arial"/>
+              <a:buChar char="■"/>
+            </a:pPr>
+            <a:r>
+              <a:rPr sz="1439" b="1">
+                <a:solidFill>
+                  <a:srgbClr val="1B2738"/>
+                </a:solidFill>
+                <a:latin typeface="Segoe UI"/>
+              </a:rPr>
+              <a:t>Проверил контринтуитивный результат</a:t>
+            </a:r>
+            <a:r>
+              <a:rPr sz="1439" b="0">
+                <a:solidFill>
+                  <a:srgbClr val="1B2738"/>
+                </a:solidFill>
+                <a:latin typeface="Segoe UI"/>
+              </a:rPr>
+              <a:t> (RabbitMQ быстрее Redis): это не про брокеры — AMQP не подтверждает публикацию, а в конфигурации с Redis один сервер обслуживал брокер, события и результаты (26 команд на задачу против 13). С </a:t>
+            </a:r>
+            <a:r>
+              <a:rPr sz="1339" b="0">
+                <a:solidFill>
+                  <a:srgbClr val="E8590C"/>
+                </a:solidFill>
+                <a:latin typeface="Consolas"/>
+              </a:rPr>
+              <a:t>confirm_publish=True</a:t>
+            </a:r>
+            <a:r>
+              <a:rPr sz="1439" b="0">
+                <a:solidFill>
+                  <a:srgbClr val="1B2738"/>
+                </a:solidFill>
+                <a:latin typeface="Segoe UI"/>
+              </a:rPr>
+              <a:t> RabbitMQ в 8 раз медленнее Redis. Разбор — </a:t>
+            </a:r>
+            <a:r>
+              <a:rPr sz="1339" b="0">
+                <a:solidFill>
+                  <a:srgbClr val="E8590C"/>
+                </a:solidFill>
+                <a:latin typeface="Consolas"/>
+              </a:rPr>
+              <a:t>docs/experiment.md</a:t>
+            </a:r>
+            <a:r>
+              <a:rPr sz="1439" b="0">
+                <a:solidFill>
+                  <a:srgbClr val="1B2738"/>
+                </a:solidFill>
+                <a:latin typeface="Segoe UI"/>
+              </a:rPr>
+              <a:t>, «Аудит».</a:t>
             </a:r>
           </a:p>
         </p:txBody>

--- a/slides/project.pptx
+++ b/slides/project.pptx
@@ -860,7 +860,7 @@
           <a:lstStyle/>
           <a:p>
             <a:r>
-              <a:t>Главное методическое решение: timestamps пишет сама задача в общий Redis-список, поэтому метрики одинаковы для всех фреймворков и не зависят от их result backend.</a:t>
+              <a:t>Главное методическое решение: timestamps пишет сама задача в общий Redis-список, поэтому метрики одинаковы для всех фреймворков; очередь наполняется заранее, поэтому измеряется скорость воркеров, а не продьюсера.</a:t>
             </a:r>
           </a:p>
         </p:txBody>
@@ -5042,7 +5042,7 @@
           <p:nvPr/>
         </p:nvGraphicFramePr>
         <p:xfrm>
-          <a:off x="566928" y="2026920"/>
+          <a:off x="566928" y="1876044"/>
           <a:ext cx="11057837" cy="1633728"/>
         </p:xfrm>
         <a:graphic>
@@ -5438,8 +5438,8 @@
         </p:nvSpPr>
         <p:spPr>
           <a:xfrm>
-            <a:off x="566928" y="3934968"/>
-            <a:ext cx="11057839" cy="2084832"/>
+            <a:off x="566928" y="3784092"/>
+            <a:ext cx="11057839" cy="2386584"/>
           </a:xfrm>
           <a:prstGeom prst="rect">
             <a:avLst/>
@@ -5526,7 +5526,7 @@
                 </a:solidFill>
                 <a:latin typeface="Segoe UI"/>
               </a:rPr>
-              <a:t> поднимает redis, rabbitmq, api (</a:t>
+              <a:t> поднимает redis (брокер), redis-backend (результаты), rabbitmq, api (</a:t>
             </a:r>
             <a:r>
               <a:rPr sz="1700" b="0">
@@ -6819,7 +6819,7 @@
                 </a:solidFill>
                 <a:latin typeface="Segoe UI"/>
               </a:rPr>
-              <a:t> (7 сервисов), </a:t>
+              <a:t> (8 сервисов), </a:t>
             </a:r>
             <a:r>
               <a:rPr sz="1400" b="0">
@@ -7411,7 +7411,7 @@
                 </a:solidFill>
                 <a:latin typeface="Segoe UI"/>
               </a:rPr>
-              <a:t>4 конфигурации × 3 типа задач × 1/2/4 воркера × 3 повтора = 135 прогонов, 81 минута</a:t>
+              <a:t>5 конфигураций × 3 типа задач × 1/2/4 воркера × 3 повтора = 135 прогонов, 89 минут</a:t>
             </a:r>
           </a:p>
         </p:txBody>
@@ -7643,7 +7643,7 @@
                 </a:solidFill>
                 <a:latin typeface="Segoe UI"/>
               </a:rPr>
-              <a:t>N = 1000, медиана трёх повторов</a:t>
+              <a:t>Медиана трёх повторов; пропускная способность — разбор заранее наполненной очереди</a:t>
             </a:r>
           </a:p>
         </p:txBody>
@@ -7657,8 +7657,8 @@
           <p:nvPr/>
         </p:nvGraphicFramePr>
         <p:xfrm>
-          <a:off x="566928" y="1860804"/>
-          <a:ext cx="11057836" cy="1995220"/>
+          <a:off x="566928" y="2009807"/>
+          <a:ext cx="11057836" cy="2225280"/>
         </p:xfrm>
         <a:graphic>
           <a:graphicData uri="http://schemas.openxmlformats.org/drawingml/2006/table">
@@ -7667,19 +7667,20 @@
                 <a:tableStyleId>{5C22544A-7EE6-4342-B048-85BDC9FD1C3A}</a:tableStyleId>
               </a:tblPr>
               <a:tblGrid>
-                <a:gridCol w="2923336"/>
-                <a:gridCol w="2287828"/>
-                <a:gridCol w="2923336"/>
-                <a:gridCol w="2923336"/>
+                <a:gridCol w="3241090"/>
+                <a:gridCol w="1715871"/>
+                <a:gridCol w="2192502"/>
+                <a:gridCol w="2192502"/>
+                <a:gridCol w="1715871"/>
               </a:tblGrid>
-              <a:tr h="399044">
+              <a:tr h="370880">
                 <a:tc>
                   <a:txBody>
                     <a:bodyPr wrap="square"/>
                     <a:lstStyle/>
                     <a:p>
                       <a:r>
-                        <a:rPr sz="1344" b="1">
+                        <a:rPr sz="1176" b="1">
                           <a:solidFill>
                             <a:srgbClr val="FFFFFF"/>
                           </a:solidFill>
@@ -7701,7 +7702,7 @@
                     <a:lstStyle/>
                     <a:p>
                       <a:r>
-                        <a:rPr sz="1344" b="1">
+                        <a:rPr sz="1176" b="1">
                           <a:solidFill>
                             <a:srgbClr val="FFFFFF"/>
                           </a:solidFill>
@@ -7723,7 +7724,7 @@
                     <a:lstStyle/>
                     <a:p>
                       <a:r>
-                        <a:rPr sz="1344" b="1">
+                        <a:rPr sz="1176" b="1">
                           <a:solidFill>
                             <a:srgbClr val="FFFFFF"/>
                           </a:solidFill>
@@ -7745,7 +7746,7 @@
                     <a:lstStyle/>
                     <a:p>
                       <a:r>
-                        <a:rPr sz="1344" b="1">
+                        <a:rPr sz="1176" b="1">
                           <a:solidFill>
                             <a:srgbClr val="FFFFFF"/>
                           </a:solidFill>
@@ -7761,15 +7762,37 @@
                     </a:solidFill>
                   </a:tcPr>
                 </a:tc>
-              </a:tr>
-              <a:tr h="399044">
                 <a:tc>
                   <a:txBody>
                     <a:bodyPr wrap="square"/>
                     <a:lstStyle/>
                     <a:p>
                       <a:r>
-                        <a:rPr sz="1344" b="0">
+                        <a:rPr sz="1176" b="1">
+                          <a:solidFill>
+                            <a:srgbClr val="FFFFFF"/>
+                          </a:solidFill>
+                          <a:latin typeface="Segoe UI"/>
+                        </a:rPr>
+                        <a:t>Задержка p50</a:t>
+                      </a:r>
+                    </a:p>
+                  </a:txBody>
+                  <a:tcPr marL="82296" marR="82296" marT="27432" marB="27432" anchor="ctr">
+                    <a:solidFill>
+                      <a:srgbClr val="2F6FED"/>
+                    </a:solidFill>
+                  </a:tcPr>
+                </a:tc>
+              </a:tr>
+              <a:tr h="370880">
+                <a:tc>
+                  <a:txBody>
+                    <a:bodyPr wrap="square"/>
+                    <a:lstStyle/>
+                    <a:p>
+                      <a:r>
+                        <a:rPr sz="1176" b="0">
                           <a:solidFill>
                             <a:srgbClr val="1B2738"/>
                           </a:solidFill>
@@ -7791,13 +7814,13 @@
                     <a:lstStyle/>
                     <a:p>
                       <a:r>
-                        <a:rPr sz="1344" b="0">
+                        <a:rPr sz="1176" b="0">
                           <a:solidFill>
                             <a:srgbClr val="1B2738"/>
                           </a:solidFill>
                           <a:latin typeface="Segoe UI"/>
                         </a:rPr>
-                        <a:t>302 → 739</a:t>
+                        <a:t>434 → 1497</a:t>
                       </a:r>
                     </a:p>
                   </a:txBody>
@@ -7813,13 +7836,13 @@
                     <a:lstStyle/>
                     <a:p>
                       <a:r>
-                        <a:rPr sz="1344" b="0">
+                        <a:rPr sz="1176" b="0">
                           <a:solidFill>
                             <a:srgbClr val="1B2738"/>
                           </a:solidFill>
                           <a:latin typeface="Segoe UI"/>
                         </a:rPr>
-                        <a:t>17 → 63</a:t>
+                        <a:t>20 → 67</a:t>
                       </a:r>
                     </a:p>
                   </a:txBody>
@@ -7835,13 +7858,35 @@
                     <a:lstStyle/>
                     <a:p>
                       <a:r>
-                        <a:rPr sz="1344" b="0">
+                        <a:rPr sz="1176" b="0">
                           <a:solidFill>
                             <a:srgbClr val="1B2738"/>
                           </a:solidFill>
                           <a:latin typeface="Segoe UI"/>
                         </a:rPr>
-                        <a:t>≈900</a:t>
+                        <a:t>1583</a:t>
+                      </a:r>
+                    </a:p>
+                  </a:txBody>
+                  <a:tcPr marL="82296" marR="82296" marT="27432" marB="27432" anchor="ctr">
+                    <a:solidFill>
+                      <a:srgbClr val="FFFFFF"/>
+                    </a:solidFill>
+                  </a:tcPr>
+                </a:tc>
+                <a:tc>
+                  <a:txBody>
+                    <a:bodyPr wrap="square"/>
+                    <a:lstStyle/>
+                    <a:p>
+                      <a:r>
+                        <a:rPr sz="1176" b="0">
+                          <a:solidFill>
+                            <a:srgbClr val="1B2738"/>
+                          </a:solidFill>
+                          <a:latin typeface="Segoe UI"/>
+                        </a:rPr>
+                        <a:t>1,8 мс</a:t>
                       </a:r>
                     </a:p>
                   </a:txBody>
@@ -7852,14 +7897,14 @@
                   </a:tcPr>
                 </a:tc>
               </a:tr>
-              <a:tr h="399044">
+              <a:tr h="370880">
                 <a:tc>
                   <a:txBody>
                     <a:bodyPr wrap="square"/>
                     <a:lstStyle/>
                     <a:p>
                       <a:r>
-                        <a:rPr sz="1344" b="0">
+                        <a:rPr sz="1176" b="0">
                           <a:solidFill>
                             <a:srgbClr val="1B2738"/>
                           </a:solidFill>
@@ -7881,13 +7926,13 @@
                     <a:lstStyle/>
                     <a:p>
                       <a:r>
-                        <a:rPr sz="1344" b="1">
+                        <a:rPr sz="1176" b="1">
                           <a:solidFill>
                             <a:srgbClr val="1B2738"/>
                           </a:solidFill>
                           <a:latin typeface="Segoe UI"/>
                         </a:rPr>
-                        <a:t>474 → 1336</a:t>
+                        <a:t>560 → 1744</a:t>
                       </a:r>
                     </a:p>
                   </a:txBody>
@@ -7903,13 +7948,13 @@
                     <a:lstStyle/>
                     <a:p>
                       <a:r>
-                        <a:rPr sz="1344" b="0">
+                        <a:rPr sz="1176" b="0">
                           <a:solidFill>
                             <a:srgbClr val="1B2738"/>
                           </a:solidFill>
                           <a:latin typeface="Segoe UI"/>
                         </a:rPr>
-                        <a:t>19 → 67</a:t>
+                        <a:t>20 → 67</a:t>
                       </a:r>
                     </a:p>
                   </a:txBody>
@@ -7925,13 +7970,35 @@
                     <a:lstStyle/>
                     <a:p>
                       <a:r>
-                        <a:rPr sz="1344" b="0">
+                        <a:rPr sz="1176" b="0">
                           <a:solidFill>
                             <a:srgbClr val="1B2738"/>
                           </a:solidFill>
                           <a:latin typeface="Segoe UI"/>
                         </a:rPr>
-                        <a:t>≈1600</a:t>
+                        <a:t>2333</a:t>
+                      </a:r>
+                    </a:p>
+                  </a:txBody>
+                  <a:tcPr marL="82296" marR="82296" marT="27432" marB="27432" anchor="ctr">
+                    <a:solidFill>
+                      <a:srgbClr val="F2F5FA"/>
+                    </a:solidFill>
+                  </a:tcPr>
+                </a:tc>
+                <a:tc>
+                  <a:txBody>
+                    <a:bodyPr wrap="square"/>
+                    <a:lstStyle/>
+                    <a:p>
+                      <a:r>
+                        <a:rPr sz="1176" b="0">
+                          <a:solidFill>
+                            <a:srgbClr val="1B2738"/>
+                          </a:solidFill>
+                          <a:latin typeface="Segoe UI"/>
+                        </a:rPr>
+                        <a:t>1,8 мс</a:t>
                       </a:r>
                     </a:p>
                   </a:txBody>
@@ -7942,38 +8009,20 @@
                   </a:tcPr>
                 </a:tc>
               </a:tr>
-              <a:tr h="399044">
+              <a:tr h="370880">
                 <a:tc>
                   <a:txBody>
                     <a:bodyPr wrap="square"/>
                     <a:lstStyle/>
                     <a:p>
                       <a:r>
-                        <a:rPr sz="1344" b="0">
+                        <a:rPr sz="1176" b="0">
                           <a:solidFill>
                             <a:srgbClr val="1B2738"/>
                           </a:solidFill>
                           <a:latin typeface="Segoe UI"/>
                         </a:rPr>
-                        <a:t>RQ </a:t>
-                      </a:r>
-                      <a:r>
-                        <a:rPr sz="1244" b="0">
-                          <a:solidFill>
-                            <a:srgbClr val="E8590C"/>
-                          </a:solidFill>
-                          <a:latin typeface="Consolas"/>
-                        </a:rPr>
-                        <a:t>Worker</a:t>
-                      </a:r>
-                      <a:r>
-                        <a:rPr sz="1344" b="0">
-                          <a:solidFill>
-                            <a:srgbClr val="1B2738"/>
-                          </a:solidFill>
-                          <a:latin typeface="Segoe UI"/>
-                        </a:rPr>
-                        <a:t> (fork)</a:t>
+                        <a:t>Celery + RabbitMQ + confirms</a:t>
                       </a:r>
                     </a:p>
                   </a:txBody>
@@ -7989,13 +8038,13 @@
                     <a:lstStyle/>
                     <a:p>
                       <a:r>
-                        <a:rPr sz="1344" b="0">
+                        <a:rPr sz="1176" b="0">
                           <a:solidFill>
                             <a:srgbClr val="1B2738"/>
                           </a:solidFill>
                           <a:latin typeface="Segoe UI"/>
                         </a:rPr>
-                        <a:t>13 → 44</a:t>
+                        <a:t>554 → 1649</a:t>
                       </a:r>
                     </a:p>
                   </a:txBody>
@@ -8011,13 +8060,13 @@
                     <a:lstStyle/>
                     <a:p>
                       <a:r>
-                        <a:rPr sz="1344" b="0">
+                        <a:rPr sz="1176" b="0">
                           <a:solidFill>
                             <a:srgbClr val="1B2738"/>
                           </a:solidFill>
                           <a:latin typeface="Segoe UI"/>
                         </a:rPr>
-                        <a:t>7 → 23</a:t>
+                        <a:t>20 → 68</a:t>
                       </a:r>
                     </a:p>
                   </a:txBody>
@@ -8033,13 +8082,35 @@
                     <a:lstStyle/>
                     <a:p>
                       <a:r>
-                        <a:rPr sz="1344" b="0">
+                        <a:rPr sz="1176" b="1">
                           <a:solidFill>
                             <a:srgbClr val="1B2738"/>
                           </a:solidFill>
                           <a:latin typeface="Segoe UI"/>
                         </a:rPr>
-                        <a:t>2100–2400</a:t>
+                        <a:t>210</a:t>
+                      </a:r>
+                    </a:p>
+                  </a:txBody>
+                  <a:tcPr marL="82296" marR="82296" marT="27432" marB="27432" anchor="ctr">
+                    <a:solidFill>
+                      <a:srgbClr val="FFFFFF"/>
+                    </a:solidFill>
+                  </a:tcPr>
+                </a:tc>
+                <a:tc>
+                  <a:txBody>
+                    <a:bodyPr wrap="square"/>
+                    <a:lstStyle/>
+                    <a:p>
+                      <a:r>
+                        <a:rPr sz="1176" b="0">
+                          <a:solidFill>
+                            <a:srgbClr val="1B2738"/>
+                          </a:solidFill>
+                          <a:latin typeface="Segoe UI"/>
+                        </a:rPr>
+                        <a:t>1,8 мс</a:t>
                       </a:r>
                     </a:p>
                   </a:txBody>
@@ -8050,14 +8121,14 @@
                   </a:tcPr>
                 </a:tc>
               </a:tr>
-              <a:tr h="399044">
+              <a:tr h="370880">
                 <a:tc>
                   <a:txBody>
                     <a:bodyPr wrap="square"/>
                     <a:lstStyle/>
                     <a:p>
                       <a:r>
-                        <a:rPr sz="1344" b="0">
+                        <a:rPr sz="1176" b="0">
                           <a:solidFill>
                             <a:srgbClr val="1B2738"/>
                           </a:solidFill>
@@ -8066,13 +8137,22 @@
                         <a:t>RQ </a:t>
                       </a:r>
                       <a:r>
-                        <a:rPr sz="1244" b="0">
+                        <a:rPr sz="1076" b="0">
                           <a:solidFill>
                             <a:srgbClr val="E8590C"/>
                           </a:solidFill>
                           <a:latin typeface="Consolas"/>
                         </a:rPr>
-                        <a:t>SimpleWorker</a:t>
+                        <a:t>Worker</a:t>
+                      </a:r>
+                      <a:r>
+                        <a:rPr sz="1176" b="0">
+                          <a:solidFill>
+                            <a:srgbClr val="1B2738"/>
+                          </a:solidFill>
+                          <a:latin typeface="Segoe UI"/>
+                        </a:rPr>
+                        <a:t> (fork)</a:t>
                       </a:r>
                     </a:p>
                   </a:txBody>
@@ -8088,13 +8168,13 @@
                     <a:lstStyle/>
                     <a:p>
                       <a:r>
-                        <a:rPr sz="1344" b="0">
+                        <a:rPr sz="1176" b="0">
                           <a:solidFill>
                             <a:srgbClr val="1B2738"/>
                           </a:solidFill>
                           <a:latin typeface="Segoe UI"/>
                         </a:rPr>
-                        <a:t>300 → 846</a:t>
+                        <a:t>13 → 45</a:t>
                       </a:r>
                     </a:p>
                   </a:txBody>
@@ -8110,13 +8190,13 @@
                     <a:lstStyle/>
                     <a:p>
                       <a:r>
-                        <a:rPr sz="1344" b="0">
+                        <a:rPr sz="1176" b="0">
                           <a:solidFill>
                             <a:srgbClr val="1B2738"/>
                           </a:solidFill>
                           <a:latin typeface="Segoe UI"/>
                         </a:rPr>
-                        <a:t>19 → 64</a:t>
+                        <a:t>7 → 24</a:t>
                       </a:r>
                     </a:p>
                   </a:txBody>
@@ -8132,13 +8212,35 @@
                     <a:lstStyle/>
                     <a:p>
                       <a:r>
-                        <a:rPr sz="1344" b="0">
+                        <a:rPr sz="1176" b="0">
                           <a:solidFill>
                             <a:srgbClr val="1B2738"/>
                           </a:solidFill>
                           <a:latin typeface="Segoe UI"/>
                         </a:rPr>
-                        <a:t>2100–2400</a:t>
+                        <a:t>2366</a:t>
+                      </a:r>
+                    </a:p>
+                  </a:txBody>
+                  <a:tcPr marL="82296" marR="82296" marT="27432" marB="27432" anchor="ctr">
+                    <a:solidFill>
+                      <a:srgbClr val="F2F5FA"/>
+                    </a:solidFill>
+                  </a:tcPr>
+                </a:tc>
+                <a:tc>
+                  <a:txBody>
+                    <a:bodyPr wrap="square"/>
+                    <a:lstStyle/>
+                    <a:p>
+                      <a:r>
+                        <a:rPr sz="1176" b="1">
+                          <a:solidFill>
+                            <a:srgbClr val="1B2738"/>
+                          </a:solidFill>
+                          <a:latin typeface="Segoe UI"/>
+                        </a:rPr>
+                        <a:t>72 мс</a:t>
                       </a:r>
                     </a:p>
                   </a:txBody>
@@ -8149,6 +8251,127 @@
                   </a:tcPr>
                 </a:tc>
               </a:tr>
+              <a:tr h="370880">
+                <a:tc>
+                  <a:txBody>
+                    <a:bodyPr wrap="square"/>
+                    <a:lstStyle/>
+                    <a:p>
+                      <a:r>
+                        <a:rPr sz="1176" b="0">
+                          <a:solidFill>
+                            <a:srgbClr val="1B2738"/>
+                          </a:solidFill>
+                          <a:latin typeface="Segoe UI"/>
+                        </a:rPr>
+                        <a:t>RQ </a:t>
+                      </a:r>
+                      <a:r>
+                        <a:rPr sz="1076" b="0">
+                          <a:solidFill>
+                            <a:srgbClr val="E8590C"/>
+                          </a:solidFill>
+                          <a:latin typeface="Consolas"/>
+                        </a:rPr>
+                        <a:t>SimpleWorker</a:t>
+                      </a:r>
+                    </a:p>
+                  </a:txBody>
+                  <a:tcPr marL="82296" marR="82296" marT="27432" marB="27432" anchor="ctr">
+                    <a:solidFill>
+                      <a:srgbClr val="FFFFFF"/>
+                    </a:solidFill>
+                  </a:tcPr>
+                </a:tc>
+                <a:tc>
+                  <a:txBody>
+                    <a:bodyPr wrap="square"/>
+                    <a:lstStyle/>
+                    <a:p>
+                      <a:r>
+                        <a:rPr sz="1176" b="0">
+                          <a:solidFill>
+                            <a:srgbClr val="1B2738"/>
+                          </a:solidFill>
+                          <a:latin typeface="Segoe UI"/>
+                        </a:rPr>
+                        <a:t>296 → 939</a:t>
+                      </a:r>
+                    </a:p>
+                  </a:txBody>
+                  <a:tcPr marL="82296" marR="82296" marT="27432" marB="27432" anchor="ctr">
+                    <a:solidFill>
+                      <a:srgbClr val="FFFFFF"/>
+                    </a:solidFill>
+                  </a:tcPr>
+                </a:tc>
+                <a:tc>
+                  <a:txBody>
+                    <a:bodyPr wrap="square"/>
+                    <a:lstStyle/>
+                    <a:p>
+                      <a:r>
+                        <a:rPr sz="1176" b="0">
+                          <a:solidFill>
+                            <a:srgbClr val="1B2738"/>
+                          </a:solidFill>
+                          <a:latin typeface="Segoe UI"/>
+                        </a:rPr>
+                        <a:t>19 → 65</a:t>
+                      </a:r>
+                    </a:p>
+                  </a:txBody>
+                  <a:tcPr marL="82296" marR="82296" marT="27432" marB="27432" anchor="ctr">
+                    <a:solidFill>
+                      <a:srgbClr val="FFFFFF"/>
+                    </a:solidFill>
+                  </a:tcPr>
+                </a:tc>
+                <a:tc>
+                  <a:txBody>
+                    <a:bodyPr wrap="square"/>
+                    <a:lstStyle/>
+                    <a:p>
+                      <a:r>
+                        <a:rPr sz="1176" b="0">
+                          <a:solidFill>
+                            <a:srgbClr val="1B2738"/>
+                          </a:solidFill>
+                          <a:latin typeface="Segoe UI"/>
+                        </a:rPr>
+                        <a:t>2567</a:t>
+                      </a:r>
+                    </a:p>
+                  </a:txBody>
+                  <a:tcPr marL="82296" marR="82296" marT="27432" marB="27432" anchor="ctr">
+                    <a:solidFill>
+                      <a:srgbClr val="FFFFFF"/>
+                    </a:solidFill>
+                  </a:tcPr>
+                </a:tc>
+                <a:tc>
+                  <a:txBody>
+                    <a:bodyPr wrap="square"/>
+                    <a:lstStyle/>
+                    <a:p>
+                      <a:r>
+                        <a:rPr sz="1176" b="0">
+                          <a:solidFill>
+                            <a:srgbClr val="1B2738"/>
+                          </a:solidFill>
+                          <a:latin typeface="Segoe UI"/>
+                        </a:rPr>
+                        <a:t>3,5 мс</a:t>
+                      </a:r>
+                    </a:p>
+                  </a:txBody>
+                  <a:tcPr marL="82296" marR="82296" marT="27432" marB="27432" anchor="ctr">
+                    <a:solidFill>
+                      <a:srgbClr val="FFFFFF"/>
+                    </a:solidFill>
+                  </a:tcPr>
+                </a:tc>
+              </a:tr>
             </a:tbl>
           </a:graphicData>
         </a:graphic>
@@ -8161,8 +8384,8 @@
         </p:nvSpPr>
         <p:spPr>
           <a:xfrm>
-            <a:off x="566928" y="4130344"/>
-            <a:ext cx="11057839" cy="2055571"/>
+            <a:off x="566928" y="4509407"/>
+            <a:ext cx="11057839" cy="1527505"/>
           </a:xfrm>
           <a:prstGeom prst="rect">
             <a:avLst/>
@@ -8177,7 +8400,7 @@
           <a:p>
             <a:pPr marL="237744" indent="-219456">
               <a:spcAft>
-                <a:spcPts val="672"/>
+                <a:spcPts val="588"/>
               </a:spcAft>
               <a:buClr>
                 <a:srgbClr val="2F6FED"/>
@@ -8186,7 +8409,7 @@
               <a:buChar char="■"/>
             </a:pPr>
             <a:r>
-              <a:rPr sz="1439" b="0">
+              <a:rPr sz="1386" b="0">
                 <a:solidFill>
                   <a:srgbClr val="1B2738"/>
                 </a:solidFill>
@@ -8195,28 +8418,46 @@
               <a:t>Накладные расходы очереди — </a:t>
             </a:r>
             <a:r>
-              <a:rPr sz="1439" b="1">
-                <a:solidFill>
-                  <a:srgbClr val="1B2738"/>
-                </a:solidFill>
-                <a:latin typeface="Segoe UI"/>
-              </a:rPr>
-              <a:t>≈3 мс</a:t>
-            </a:r>
-            <a:r>
-              <a:rPr sz="1439" b="0">
-                <a:solidFill>
-                  <a:srgbClr val="1B2738"/>
-                </a:solidFill>
-                <a:latin typeface="Segoe UI"/>
-              </a:rPr>
-              <a:t> на задачу end-to-end (Celery + Redis, 4 воркера: p50 = 3 мс, p99 = 4 мс).</a:t>
+              <a:rPr sz="1386" b="1">
+                <a:solidFill>
+                  <a:srgbClr val="1B2738"/>
+                </a:solidFill>
+                <a:latin typeface="Segoe UI"/>
+              </a:rPr>
+              <a:t>1,8 мс</a:t>
+            </a:r>
+            <a:r>
+              <a:rPr sz="1386" b="0">
+                <a:solidFill>
+                  <a:srgbClr val="1B2738"/>
+                </a:solidFill>
+                <a:latin typeface="Segoe UI"/>
+              </a:rPr>
+              <a:t> на задачу у Celery, 3,5 мс у RQ </a:t>
+            </a:r>
+            <a:r>
+              <a:rPr sz="1286" b="0">
+                <a:solidFill>
+                  <a:srgbClr val="E8590C"/>
+                </a:solidFill>
+                <a:latin typeface="Consolas"/>
+              </a:rPr>
+              <a:t>SimpleWorker</a:t>
+            </a:r>
+            <a:r>
+              <a:rPr sz="1386" b="0">
+                <a:solidFill>
+                  <a:srgbClr val="1B2738"/>
+                </a:solidFill>
+                <a:latin typeface="Segoe UI"/>
+              </a:rPr>
+              <a:t>, 72 мс у RQ с fork.</a:t>
             </a:r>
           </a:p>
           <a:p>
             <a:pPr marL="237744" indent="-219456">
               <a:spcAft>
-                <a:spcPts val="672"/>
+                <a:spcPts val="588"/>
               </a:spcAft>
               <a:buClr>
                 <a:srgbClr val="2F6FED"/>
@@ -8225,7 +8466,7 @@
               <a:buChar char="■"/>
             </a:pPr>
             <a:r>
-              <a:rPr sz="1439" b="1">
+              <a:rPr sz="1386" b="1">
                 <a:solidFill>
                   <a:srgbClr val="1B2738"/>
                 </a:solidFill>
@@ -8234,19 +8475,19 @@
               <a:t>От ≈50 мс полезной работы фреймворк и брокер не влияют</a:t>
             </a:r>
             <a:r>
-              <a:rPr sz="1439" b="0">
-                <a:solidFill>
-                  <a:srgbClr val="1B2738"/>
-                </a:solidFill>
-                <a:latin typeface="Segoe UI"/>
-              </a:rPr>
-              <a:t> на пропускную способность — выбирать надо по гарантиям, а не по бенчмаркам.</a:t>
+              <a:rPr sz="1386" b="0">
+                <a:solidFill>
+                  <a:srgbClr val="1B2738"/>
+                </a:solidFill>
+                <a:latin typeface="Segoe UI"/>
+              </a:rPr>
+              <a:t> на пропускную способность; масштабирование воркерами — ×3,0–4,1.</a:t>
             </a:r>
           </a:p>
           <a:p>
             <a:pPr marL="237744" indent="-219456">
               <a:spcAft>
-                <a:spcPts val="672"/>
+                <a:spcPts val="588"/>
               </a:spcAft>
               <a:buClr>
                 <a:srgbClr val="2F6FED"/>
@@ -8255,55 +8496,46 @@
               <a:buChar char="■"/>
             </a:pPr>
             <a:r>
-              <a:rPr sz="1439" b="0">
-                <a:solidFill>
-                  <a:srgbClr val="1B2738"/>
-                </a:solidFill>
-                <a:latin typeface="Segoe UI"/>
-              </a:rPr>
-              <a:t>Масштабирование воркерами — </a:t>
-            </a:r>
-            <a:r>
-              <a:rPr sz="1439" b="1">
-                <a:solidFill>
-                  <a:srgbClr val="1B2738"/>
-                </a:solidFill>
-                <a:latin typeface="Segoe UI"/>
-              </a:rPr>
-              <a:t>×3,4–4,1</a:t>
-            </a:r>
-            <a:r>
-              <a:rPr sz="1439" b="0">
-                <a:solidFill>
-                  <a:srgbClr val="1B2738"/>
-                </a:solidFill>
-                <a:latin typeface="Segoe UI"/>
-              </a:rPr>
-              <a:t> при четырёх воркерах; </a:t>
-            </a:r>
-            <a:r>
-              <a:rPr sz="1339" b="0">
+              <a:rPr sz="1386" b="1">
+                <a:solidFill>
+                  <a:srgbClr val="1B2738"/>
+                </a:solidFill>
+                <a:latin typeface="Segoe UI"/>
+              </a:rPr>
+              <a:t>Преимущество RabbitMQ на постановке куплено отсутствием подтверждения</a:t>
+            </a:r>
+            <a:r>
+              <a:rPr sz="1386" b="0">
+                <a:solidFill>
+                  <a:srgbClr val="1B2738"/>
+                </a:solidFill>
+                <a:latin typeface="Segoe UI"/>
+              </a:rPr>
+              <a:t>: с </a:t>
+            </a:r>
+            <a:r>
+              <a:rPr sz="1286" b="0">
                 <a:solidFill>
                   <a:srgbClr val="E8590C"/>
                 </a:solidFill>
                 <a:latin typeface="Consolas"/>
               </a:rPr>
-              <a:t>fork</a:t>
-            </a:r>
-            <a:r>
-              <a:rPr sz="1439" b="0">
-                <a:solidFill>
-                  <a:srgbClr val="1B2738"/>
-                </a:solidFill>
-                <a:latin typeface="Segoe UI"/>
-              </a:rPr>
-              <a:t> в RQ стоит порядок величины на микрозадачах.</a:t>
+              <a:t>confirm_publish</a:t>
+            </a:r>
+            <a:r>
+              <a:rPr sz="1386" b="0">
+                <a:solidFill>
+                  <a:srgbClr val="1B2738"/>
+                </a:solidFill>
+                <a:latin typeface="Segoe UI"/>
+              </a:rPr>
+              <a:t> — 210 msg/s против 1583 у Redis.</a:t>
             </a:r>
           </a:p>
           <a:p>
             <a:pPr marL="237744" indent="-219456">
               <a:spcAft>
-                <a:spcPts val="672"/>
+                <a:spcPts val="588"/>
               </a:spcAft>
               <a:buClr>
                 <a:srgbClr val="2F6FED"/>
@@ -8312,58 +8544,40 @@
               <a:buChar char="■"/>
             </a:pPr>
             <a:r>
-              <a:rPr sz="1439" b="1">
-                <a:solidFill>
-                  <a:srgbClr val="1B2738"/>
-                </a:solidFill>
-                <a:latin typeface="Segoe UI"/>
-              </a:rPr>
-              <a:t>Проверил контринтуитивный результат</a:t>
-            </a:r>
-            <a:r>
-              <a:rPr sz="1439" b="0">
-                <a:solidFill>
-                  <a:srgbClr val="1B2738"/>
-                </a:solidFill>
-                <a:latin typeface="Segoe UI"/>
-              </a:rPr>
-              <a:t> (RabbitMQ быстрее Redis): это не про брокеры — AMQP не подтверждает публикацию, а в конфигурации с Redis один сервер обслуживал брокер, события и результаты (26 команд на задачу против 13). С </a:t>
-            </a:r>
-            <a:r>
-              <a:rPr sz="1339" b="0">
+              <a:rPr sz="1386" b="1">
+                <a:solidFill>
+                  <a:srgbClr val="1B2738"/>
+                </a:solidFill>
+                <a:latin typeface="Segoe UI"/>
+              </a:rPr>
+              <a:t>Первую версию эксперимента пришлось переснять</a:t>
+            </a:r>
+            <a:r>
+              <a:rPr sz="1386" b="0">
+                <a:solidFill>
+                  <a:srgbClr val="1B2738"/>
+                </a:solidFill>
+                <a:latin typeface="Segoe UI"/>
+              </a:rPr>
+              <a:t>: аудит нашёл перекос (один Redis обслуживал брокер, события и результаты), измерение продьюсера вместо воркеров и «задержку», которая была временем ожидания в очереди. Разбор — </a:t>
+            </a:r>
+            <a:r>
+              <a:rPr sz="1286" b="0">
                 <a:solidFill>
                   <a:srgbClr val="E8590C"/>
                 </a:solidFill>
                 <a:latin typeface="Consolas"/>
               </a:rPr>
-              <a:t>confirm_publish=True</a:t>
-            </a:r>
-            <a:r>
-              <a:rPr sz="1439" b="0">
-                <a:solidFill>
-                  <a:srgbClr val="1B2738"/>
-                </a:solidFill>
-                <a:latin typeface="Segoe UI"/>
-              </a:rPr>
-              <a:t> RabbitMQ в 8 раз медленнее Redis. Разбор — </a:t>
-            </a:r>
-            <a:r>
-              <a:rPr sz="1339" b="0">
-                <a:solidFill>
-                  <a:srgbClr val="E8590C"/>
-                </a:solidFill>
-                <a:latin typeface="Consolas"/>
-              </a:rPr>
               <a:t>docs/experiment.md</a:t>
             </a:r>
             <a:r>
-              <a:rPr sz="1439" b="0">
-                <a:solidFill>
-                  <a:srgbClr val="1B2738"/>
-                </a:solidFill>
-                <a:latin typeface="Segoe UI"/>
-              </a:rPr>
-              <a:t>, «Аудит».</a:t>
+              <a:rPr sz="1386" b="0">
+                <a:solidFill>
+                  <a:srgbClr val="1B2738"/>
+                </a:solidFill>
+                <a:latin typeface="Segoe UI"/>
+              </a:rPr>
+              <a:t>.</a:t>
             </a:r>
           </a:p>
         </p:txBody>

--- a/slides/project.pptx
+++ b/slides/project.pptx
@@ -4221,31 +4221,6 @@
                 <a:latin typeface="Segoe UI"/>
               </a:rPr>
               <a:t>Кычкин Кирилл</a:t>
-            </a:r>
-          </a:p>
-          <a:p>
-            <a:pPr>
-              <a:spcAft>
-                <a:spcPts val="1200"/>
-              </a:spcAft>
-            </a:pPr>
-            <a:r>
-              <a:rPr sz="1500">
-                <a:solidFill>
-                  <a:srgbClr val="5B6B7C"/>
-                </a:solidFill>
-                <a:latin typeface="Segoe UI"/>
-              </a:rPr>
-              <a:t>Репозиторий:  </a:t>
-            </a:r>
-            <a:r>
-              <a:rPr sz="1700" b="0">
-                <a:solidFill>
-                  <a:srgbClr val="1B2738"/>
-                </a:solidFill>
-                <a:latin typeface="Consolas"/>
-              </a:rPr>
-              <a:t>github.com/kirillkychkin/report-queue</a:t>
             </a:r>
           </a:p>
           <a:p>
@@ -9501,7 +9476,7 @@
                 </a:solidFill>
                 <a:latin typeface="Segoe UI"/>
               </a:rPr>
-              <a:t> — 20×; Redis против RabbitMQ на реальных задачах — 0 %.</a:t>
+              <a:t> — 23×; Redis против RabbitMQ на реальных задачах — 0 %, а первую версию эксперимента пришлось переснять.</a:t>
             </a:r>
           </a:p>
           <a:p>
@@ -9655,7 +9630,7 @@
                 </a:solidFill>
                 <a:latin typeface="Segoe UI"/>
               </a:rPr>
-              <a:t>Репозиторий: </a:t>
+              <a:t>Проект собирается и запускается одной командой; все решения задокументированы в </a:t>
             </a:r>
             <a:r>
               <a:rPr sz="1500" b="0">
@@ -9664,7 +9639,7 @@
                 </a:solidFill>
                 <a:latin typeface="Consolas"/>
               </a:rPr>
-              <a:t>github.com/kirillkychkin/report-queue</a:t>
+              <a:t>docs/architecture.md</a:t>
             </a:r>
             <a:r>
               <a:rPr sz="1600" b="0">
@@ -9673,43 +9648,7 @@
                 </a:solidFill>
                 <a:latin typeface="Segoe UI"/>
               </a:rPr>
-              <a:t> — код, </a:t>
-            </a:r>
-            <a:r>
-              <a:rPr sz="1500" b="0">
-                <a:solidFill>
-                  <a:srgbClr val="E8590C"/>
-                </a:solidFill>
-                <a:latin typeface="Consolas"/>
-              </a:rPr>
-              <a:t>docs/</a:t>
-            </a:r>
-            <a:r>
-              <a:rPr sz="1600" b="0">
-                <a:solidFill>
-                  <a:srgbClr val="1B2738"/>
-                </a:solidFill>
-                <a:latin typeface="Segoe UI"/>
-              </a:rPr>
-              <a:t>, </a:t>
-            </a:r>
-            <a:r>
-              <a:rPr sz="1500" b="0">
-                <a:solidFill>
-                  <a:srgbClr val="E8590C"/>
-                </a:solidFill>
-                <a:latin typeface="Consolas"/>
-              </a:rPr>
-              <a:t>bench/results/</a:t>
-            </a:r>
-            <a:r>
-              <a:rPr sz="1600" b="0">
-                <a:solidFill>
-                  <a:srgbClr val="1B2738"/>
-                </a:solidFill>
-                <a:latin typeface="Segoe UI"/>
-              </a:rPr>
-              <a:t> (135 прогонов) и обе презентации.</a:t>
+              <a:t> по шаблону «решение / почему / альтернативы / где не работает».</a:t>
             </a:r>
           </a:p>
         </p:txBody>
